--- a/docs/EcoTroc_Soutenance.pptx
+++ b/docs/EcoTroc_Soutenance.pptx
@@ -125,7 +125,7 @@
 <file path=ppt/revisionInfo.xml><?xml version="1.0" encoding="utf-8"?>
 <p1510:revInfo xmlns:a="http://schemas.openxmlformats.org/drawingml/2006/main" xmlns:r="http://schemas.openxmlformats.org/officeDocument/2006/relationships" xmlns:p1510="http://schemas.microsoft.com/office/powerpoint/2015/10/main">
   <p1510:revLst>
-    <p1510:client id="{D5CB14BC-50DE-7CE4-E02C-9C69F71A3D5A}" v="433" dt="2026-05-07T09:07:27.742"/>
+    <p1510:client id="{D5CB14BC-50DE-7CE4-E02C-9C69F71A3D5A}" v="537" dt="2026-05-07T10:14:54.654"/>
   </p1510:revLst>
 </p1510:revInfo>
 </file>
@@ -2580,7 +2580,7 @@
           <a:ln/>
         </p:spPr>
         <p:txBody>
-          <a:bodyPr wrap="square" rtlCol="0" anchor="ctr"/>
+          <a:bodyPr wrap="square" lIns="91440" tIns="45720" rIns="91440" bIns="45720" rtlCol="0" anchor="ctr"/>
           <a:lstStyle/>
           <a:p>
             <a:pPr marL="0" indent="0">
@@ -2591,11 +2591,11 @@
                 <a:solidFill>
                   <a:srgbClr val="2D6A4F"/>
                 </a:solidFill>
-                <a:latin typeface="Calibri" pitchFamily="34" charset="0"/>
-                <a:ea typeface="Calibri" pitchFamily="34" charset="-122"/>
-                <a:cs typeface="Calibri" pitchFamily="34" charset="-120"/>
-              </a:rPr>
-              <a:t>HTML5 + CSS3 + JS Vanilla</a:t>
+                <a:latin typeface="Calibri"/>
+                <a:ea typeface="Calibri"/>
+                <a:cs typeface="Calibri"/>
+              </a:rPr>
+              <a:t>HTML5 + CSS3 + JS </a:t>
             </a:r>
             <a:endParaRPr lang="en-US" sz="1300"/>
           </a:p>
@@ -5830,7 +5830,7 @@
           <a:lstStyle/>
           <a:p>
             <a:r>
-              <a:rPr lang="en-US" sz="1200" b="1">
+              <a:rPr lang="en-US" sz="1200" b="1" dirty="0">
                 <a:solidFill>
                   <a:srgbClr val="1B4332"/>
                 </a:solidFill>
@@ -5838,10 +5838,10 @@
                 <a:ea typeface="Calibri"/>
                 <a:cs typeface="Calibri"/>
               </a:rPr>
-              <a:t>JS Vanilla —  1 framework </a:t>
-            </a:r>
-            <a:r>
-              <a:rPr lang="en-US" sz="1200" b="1" err="1">
+              <a:t>JS —  1 framework </a:t>
+            </a:r>
+            <a:r>
+              <a:rPr lang="en-US" sz="1200" b="1" dirty="0" err="1">
                 <a:solidFill>
                   <a:srgbClr val="1B4332"/>
                 </a:solidFill>
@@ -5852,7 +5852,7 @@
               <a:t>minime</a:t>
             </a:r>
             <a:r>
-              <a:rPr lang="en-US" sz="1200" b="1">
+              <a:rPr lang="en-US" sz="1200" b="1" dirty="0">
                 <a:solidFill>
                   <a:srgbClr val="1B4332"/>
                 </a:solidFill>
@@ -5860,8 +5860,27 @@
                 <a:ea typeface="Calibri"/>
                 <a:cs typeface="Calibri"/>
               </a:rPr>
-              <a:t> utilisé</a:t>
-            </a:r>
+              <a:t> </a:t>
+            </a:r>
+            <a:r>
+              <a:rPr lang="en-US" sz="1200" b="1" dirty="0" err="1">
+                <a:solidFill>
+                  <a:srgbClr val="1B4332"/>
+                </a:solidFill>
+                <a:latin typeface="Calibri"/>
+                <a:ea typeface="Calibri"/>
+                <a:cs typeface="Calibri"/>
+              </a:rPr>
+              <a:t>utilisé</a:t>
+            </a:r>
+            <a:endParaRPr lang="en-US" sz="1200" b="1" dirty="0">
+              <a:solidFill>
+                <a:srgbClr val="1B4332"/>
+              </a:solidFill>
+              <a:latin typeface="Calibri"/>
+              <a:ea typeface="Calibri"/>
+              <a:cs typeface="Calibri"/>
+            </a:endParaRPr>
           </a:p>
         </p:txBody>
       </p:sp>
@@ -10471,138 +10490,6 @@
           </a:p>
         </p:txBody>
       </p:sp>
-      <p:sp>
-        <p:nvSpPr>
-          <p:cNvPr id="18" name="Shape 16"/>
-          <p:cNvSpPr/>
-          <p:nvPr/>
-        </p:nvSpPr>
-        <p:spPr>
-          <a:xfrm>
-            <a:off x="4754880" y="2340864"/>
-            <a:ext cx="45720" cy="411480"/>
-          </a:xfrm>
-          <a:prstGeom prst="rect">
-            <a:avLst/>
-          </a:prstGeom>
-          <a:solidFill>
-            <a:srgbClr val="52B788"/>
-          </a:solidFill>
-          <a:ln/>
-        </p:spPr>
-        <p:txBody>
-          <a:bodyPr/>
-          <a:lstStyle/>
-          <a:p>
-            <a:endParaRPr lang="fr-FR"/>
-          </a:p>
-        </p:txBody>
-      </p:sp>
-      <p:sp>
-        <p:nvSpPr>
-          <p:cNvPr id="19" name="Text 17"/>
-          <p:cNvSpPr/>
-          <p:nvPr/>
-        </p:nvSpPr>
-        <p:spPr>
-          <a:xfrm>
-            <a:off x="4937760" y="2340864"/>
-            <a:ext cx="3840480" cy="411480"/>
-          </a:xfrm>
-          <a:prstGeom prst="rect">
-            <a:avLst/>
-          </a:prstGeom>
-          <a:noFill/>
-          <a:ln/>
-        </p:spPr>
-        <p:txBody>
-          <a:bodyPr wrap="square" rtlCol="0" anchor="ctr"/>
-          <a:lstStyle/>
-          <a:p>
-            <a:pPr marL="0" indent="0">
-              <a:buNone/>
-            </a:pPr>
-            <a:r>
-              <a:rPr lang="en-US" sz="1400">
-                <a:solidFill>
-                  <a:srgbClr val="1A1A1A"/>
-                </a:solidFill>
-                <a:latin typeface="Calibri" pitchFamily="34" charset="0"/>
-                <a:ea typeface="Calibri" pitchFamily="34" charset="-122"/>
-                <a:cs typeface="Calibri" pitchFamily="34" charset="-120"/>
-              </a:rPr>
-              <a:t>8  Organisation Équipe</a:t>
-            </a:r>
-            <a:endParaRPr lang="en-US" sz="1400"/>
-          </a:p>
-        </p:txBody>
-      </p:sp>
-      <p:sp>
-        <p:nvSpPr>
-          <p:cNvPr id="20" name="Shape 18"/>
-          <p:cNvSpPr/>
-          <p:nvPr/>
-        </p:nvSpPr>
-        <p:spPr>
-          <a:xfrm>
-            <a:off x="4754880" y="3054096"/>
-            <a:ext cx="45720" cy="411480"/>
-          </a:xfrm>
-          <a:prstGeom prst="rect">
-            <a:avLst/>
-          </a:prstGeom>
-          <a:solidFill>
-            <a:srgbClr val="52B788"/>
-          </a:solidFill>
-          <a:ln/>
-        </p:spPr>
-        <p:txBody>
-          <a:bodyPr/>
-          <a:lstStyle/>
-          <a:p>
-            <a:endParaRPr lang="fr-FR"/>
-          </a:p>
-        </p:txBody>
-      </p:sp>
-      <p:sp>
-        <p:nvSpPr>
-          <p:cNvPr id="21" name="Text 19"/>
-          <p:cNvSpPr/>
-          <p:nvPr/>
-        </p:nvSpPr>
-        <p:spPr>
-          <a:xfrm>
-            <a:off x="4937760" y="3054096"/>
-            <a:ext cx="3840480" cy="411480"/>
-          </a:xfrm>
-          <a:prstGeom prst="rect">
-            <a:avLst/>
-          </a:prstGeom>
-          <a:noFill/>
-          <a:ln/>
-        </p:spPr>
-        <p:txBody>
-          <a:bodyPr wrap="square" rtlCol="0" anchor="ctr"/>
-          <a:lstStyle/>
-          <a:p>
-            <a:pPr marL="0" indent="0">
-              <a:buNone/>
-            </a:pPr>
-            <a:r>
-              <a:rPr lang="en-US" sz="1400">
-                <a:solidFill>
-                  <a:srgbClr val="1A1A1A"/>
-                </a:solidFill>
-                <a:latin typeface="Calibri" pitchFamily="34" charset="0"/>
-                <a:ea typeface="Calibri" pitchFamily="34" charset="-122"/>
-                <a:cs typeface="Calibri" pitchFamily="34" charset="-120"/>
-              </a:rPr>
-              <a:t>9  Bilan</a:t>
-            </a:r>
-            <a:endParaRPr lang="en-US" sz="1400"/>
-          </a:p>
-        </p:txBody>
-      </p:sp>
     </p:spTree>
   </p:cSld>
   <p:clrMapOvr>
@@ -11970,7 +11857,7 @@
           <p:nvPr>
             <p:extLst>
               <p:ext uri="{D42A27DB-BD31-4B8C-83A1-F6EECF244321}">
-                <p14:modId xmlns:p14="http://schemas.microsoft.com/office/powerpoint/2010/main" val="1579011935"/>
+                <p14:modId xmlns:p14="http://schemas.microsoft.com/office/powerpoint/2010/main" val="4277693886"/>
               </p:ext>
             </p:extLst>
           </p:nvPr>
@@ -12091,20 +11978,20 @@
                         <a:buNone/>
                       </a:pPr>
                       <a:r>
-                        <a:rPr lang="en-US" sz="1200" b="1">
+                        <a:rPr lang="en-US" sz="1200" b="1" dirty="0" err="1">
                           <a:solidFill>
                             <a:srgbClr val="FFFFFF"/>
                           </a:solidFill>
-                          <a:latin typeface="Calibri" pitchFamily="34" charset="0"/>
-                          <a:ea typeface="Calibri" pitchFamily="34" charset="-122"/>
-                          <a:cs typeface="Calibri" pitchFamily="34" charset="-120"/>
+                          <a:latin typeface="Calibri"/>
+                          <a:ea typeface="Calibri"/>
+                          <a:cs typeface="Calibri"/>
                         </a:rPr>
                         <a:t>Poids</a:t>
                       </a:r>
-                      <a:endParaRPr lang="en-US" sz="1200">
-                        <a:latin typeface="Calibri" charset="0"/>
-                        <a:ea typeface="Calibri" charset="0"/>
-                        <a:cs typeface="Calibri" charset="0"/>
+                      <a:endParaRPr lang="en-US" sz="1200" dirty="0" err="1">
+                        <a:latin typeface="Calibri"/>
+                        <a:ea typeface="Calibri"/>
+                        <a:cs typeface="Calibri"/>
                       </a:endParaRPr>
                     </a:p>
                   </a:txBody>
@@ -12159,20 +12046,20 @@
                         <a:buNone/>
                       </a:pPr>
                       <a:r>
-                        <a:rPr lang="en-US" sz="1200" b="1">
+                        <a:rPr lang="en-US" sz="1200" b="1" dirty="0" err="1">
                           <a:solidFill>
                             <a:srgbClr val="FFFFFF"/>
                           </a:solidFill>
-                          <a:latin typeface="Calibri" pitchFamily="34" charset="0"/>
-                          <a:ea typeface="Calibri" pitchFamily="34" charset="-122"/>
-                          <a:cs typeface="Calibri" pitchFamily="34" charset="-120"/>
+                          <a:latin typeface="Calibri"/>
+                          <a:ea typeface="Calibri"/>
+                          <a:cs typeface="Calibri"/>
                         </a:rPr>
                         <a:t>EcoIndex</a:t>
                       </a:r>
-                      <a:endParaRPr lang="en-US" sz="1200">
-                        <a:latin typeface="Calibri" charset="0"/>
-                        <a:ea typeface="Calibri" charset="0"/>
-                        <a:cs typeface="Calibri" charset="0"/>
+                      <a:endParaRPr lang="en-US" sz="1200" dirty="0" err="1">
+                        <a:latin typeface="Calibri"/>
+                        <a:ea typeface="Calibri"/>
+                        <a:cs typeface="Calibri"/>
                       </a:endParaRPr>
                     </a:p>
                   </a:txBody>
@@ -12227,20 +12114,31 @@
                         <a:buNone/>
                       </a:pPr>
                       <a:r>
-                        <a:rPr lang="en-US" sz="1200" b="1">
+                        <a:rPr lang="en-US" sz="1200" b="1" dirty="0">
                           <a:solidFill>
                             <a:srgbClr val="FFFFFF"/>
                           </a:solidFill>
-                          <a:latin typeface="Calibri" pitchFamily="34" charset="0"/>
-                          <a:ea typeface="Calibri" pitchFamily="34" charset="-122"/>
-                          <a:cs typeface="Calibri" pitchFamily="34" charset="-120"/>
+                          <a:latin typeface="Calibri"/>
+                          <a:ea typeface="Calibri"/>
+                          <a:cs typeface="Calibri"/>
                         </a:rPr>
-                        <a:t>CO₂/visite</a:t>
+                        <a:t>CO₂/</a:t>
                       </a:r>
-                      <a:endParaRPr lang="en-US" sz="1200">
-                        <a:latin typeface="Calibri" charset="0"/>
-                        <a:ea typeface="Calibri" charset="0"/>
-                        <a:cs typeface="Calibri" charset="0"/>
+                      <a:r>
+                        <a:rPr lang="en-US" sz="1200" b="1" dirty="0" err="1">
+                          <a:solidFill>
+                            <a:srgbClr val="FFFFFF"/>
+                          </a:solidFill>
+                          <a:latin typeface="Calibri"/>
+                          <a:ea typeface="Calibri"/>
+                          <a:cs typeface="Calibri"/>
+                        </a:rPr>
+                        <a:t>visite</a:t>
+                      </a:r>
+                      <a:endParaRPr lang="en-US" sz="1200" dirty="0" err="1">
+                        <a:latin typeface="Calibri"/>
+                        <a:ea typeface="Calibri"/>
+                        <a:cs typeface="Calibri"/>
                       </a:endParaRPr>
                     </a:p>
                   </a:txBody>
@@ -12302,20 +12200,31 @@
                         <a:buNone/>
                       </a:pPr>
                       <a:r>
-                        <a:rPr lang="en-US" sz="1200" b="1">
+                        <a:rPr lang="en-US" sz="1200" b="1" dirty="0" err="1">
                           <a:solidFill>
                             <a:srgbClr val="1B4332"/>
                           </a:solidFill>
-                          <a:latin typeface="Calibri" pitchFamily="34" charset="0"/>
-                          <a:ea typeface="Calibri" pitchFamily="34" charset="-122"/>
-                          <a:cs typeface="Calibri" pitchFamily="34" charset="-120"/>
+                          <a:latin typeface="Calibri"/>
+                          <a:ea typeface="Calibri"/>
+                          <a:cs typeface="Calibri"/>
                         </a:rPr>
-                        <a:t>EcoTroc ✓</a:t>
+                        <a:t>EcoTroc</a:t>
                       </a:r>
-                      <a:endParaRPr lang="en-US" sz="1200">
-                        <a:latin typeface="Calibri" charset="0"/>
-                        <a:ea typeface="Calibri" charset="0"/>
-                        <a:cs typeface="Calibri" charset="0"/>
+                      <a:r>
+                        <a:rPr lang="en-US" sz="1200" b="1" dirty="0">
+                          <a:solidFill>
+                            <a:srgbClr val="1B4332"/>
+                          </a:solidFill>
+                          <a:latin typeface="Calibri"/>
+                          <a:ea typeface="Calibri"/>
+                          <a:cs typeface="Calibri"/>
+                        </a:rPr>
+                        <a:t> ✓</a:t>
+                      </a:r>
+                      <a:endParaRPr lang="en-US" sz="1200" dirty="0">
+                        <a:latin typeface="Calibri"/>
+                        <a:ea typeface="Calibri"/>
+                        <a:cs typeface="Calibri"/>
                       </a:endParaRPr>
                     </a:p>
                   </a:txBody>
@@ -12641,16 +12550,16 @@
                           <a:solidFill>
                             <a:srgbClr val="000000"/>
                           </a:solidFill>
-                          <a:latin typeface="Calibri" pitchFamily="34" charset="0"/>
-                          <a:ea typeface="Calibri" pitchFamily="34" charset="-122"/>
-                          <a:cs typeface="Calibri" pitchFamily="34" charset="-120"/>
+                          <a:latin typeface="Calibri"/>
+                          <a:ea typeface="Calibri"/>
+                          <a:cs typeface="Calibri"/>
                         </a:rPr>
-                        <a:t>~2,8 Mo</a:t>
+                        <a:t>~3,2 Mo</a:t>
                       </a:r>
                       <a:endParaRPr lang="en-US" sz="1200">
-                        <a:latin typeface="Calibri" charset="0"/>
-                        <a:ea typeface="Calibri" charset="0"/>
-                        <a:cs typeface="Calibri" charset="0"/>
+                        <a:latin typeface="Calibri"/>
+                        <a:ea typeface="Calibri"/>
+                        <a:cs typeface="Calibri"/>
                       </a:endParaRPr>
                     </a:p>
                   </a:txBody>
@@ -12706,16 +12615,16 @@
                           <a:solidFill>
                             <a:srgbClr val="000000"/>
                           </a:solidFill>
-                          <a:latin typeface="Calibri" pitchFamily="34" charset="0"/>
-                          <a:ea typeface="Calibri" pitchFamily="34" charset="-122"/>
-                          <a:cs typeface="Calibri" pitchFamily="34" charset="-120"/>
+                          <a:latin typeface="Calibri"/>
+                          <a:ea typeface="Calibri"/>
+                          <a:cs typeface="Calibri"/>
                         </a:rPr>
-                        <a:t>G (18)</a:t>
+                        <a:t>F (15)</a:t>
                       </a:r>
                       <a:endParaRPr lang="en-US" sz="1200">
-                        <a:latin typeface="Calibri" charset="0"/>
-                        <a:ea typeface="Calibri" charset="0"/>
-                        <a:cs typeface="Calibri" charset="0"/>
+                        <a:latin typeface="Calibri"/>
+                        <a:ea typeface="Calibri"/>
+                        <a:cs typeface="Calibri"/>
                       </a:endParaRPr>
                     </a:p>
                   </a:txBody>
@@ -12771,16 +12680,16 @@
                           <a:solidFill>
                             <a:srgbClr val="000000"/>
                           </a:solidFill>
-                          <a:latin typeface="Calibri" pitchFamily="34" charset="0"/>
-                          <a:ea typeface="Calibri" pitchFamily="34" charset="-122"/>
-                          <a:cs typeface="Calibri" pitchFamily="34" charset="-120"/>
+                          <a:latin typeface="Calibri"/>
+                          <a:ea typeface="Calibri"/>
+                          <a:cs typeface="Calibri"/>
                         </a:rPr>
-                        <a:t>0,68 g</a:t>
+                        <a:t>2,7 g</a:t>
                       </a:r>
                       <a:endParaRPr lang="en-US" sz="1200">
-                        <a:latin typeface="Calibri" charset="0"/>
-                        <a:ea typeface="Calibri" charset="0"/>
-                        <a:cs typeface="Calibri" charset="0"/>
+                        <a:latin typeface="Calibri"/>
+                        <a:ea typeface="Calibri"/>
+                        <a:cs typeface="Calibri"/>
                       </a:endParaRPr>
                     </a:p>
                   </a:txBody>
@@ -12839,20 +12748,20 @@
                         <a:buNone/>
                       </a:pPr>
                       <a:r>
-                        <a:rPr lang="en-US" sz="1200">
+                        <a:rPr lang="en-US" sz="1200" dirty="0" err="1">
                           <a:solidFill>
                             <a:srgbClr val="000000"/>
                           </a:solidFill>
-                          <a:latin typeface="Calibri" pitchFamily="34" charset="0"/>
-                          <a:ea typeface="Calibri" pitchFamily="34" charset="-122"/>
-                          <a:cs typeface="Calibri" pitchFamily="34" charset="-120"/>
+                          <a:latin typeface="Calibri"/>
+                          <a:ea typeface="Calibri"/>
+                          <a:cs typeface="Calibri"/>
                         </a:rPr>
                         <a:t>Geev</a:t>
                       </a:r>
-                      <a:endParaRPr lang="en-US" sz="1200">
-                        <a:latin typeface="Calibri" charset="0"/>
-                        <a:ea typeface="Calibri" charset="0"/>
-                        <a:cs typeface="Calibri" charset="0"/>
+                      <a:endParaRPr lang="en-US" sz="1200" dirty="0" err="1">
+                        <a:latin typeface="Calibri"/>
+                        <a:ea typeface="Calibri"/>
+                        <a:cs typeface="Calibri"/>
                       </a:endParaRPr>
                     </a:p>
                   </a:txBody>
@@ -12908,16 +12817,16 @@
                           <a:solidFill>
                             <a:srgbClr val="000000"/>
                           </a:solidFill>
-                          <a:latin typeface="Calibri" pitchFamily="34" charset="0"/>
-                          <a:ea typeface="Calibri" pitchFamily="34" charset="-122"/>
-                          <a:cs typeface="Calibri" pitchFamily="34" charset="-120"/>
+                          <a:latin typeface="Calibri"/>
+                          <a:ea typeface="Calibri"/>
+                          <a:cs typeface="Calibri"/>
                         </a:rPr>
-                        <a:t>~1,4 Mo</a:t>
+                        <a:t>~3,8 Mo</a:t>
                       </a:r>
                       <a:endParaRPr lang="en-US" sz="1200">
-                        <a:latin typeface="Calibri" charset="0"/>
-                        <a:ea typeface="Calibri" charset="0"/>
-                        <a:cs typeface="Calibri" charset="0"/>
+                        <a:latin typeface="Calibri"/>
+                        <a:ea typeface="Calibri"/>
+                        <a:cs typeface="Calibri"/>
                       </a:endParaRPr>
                     </a:p>
                   </a:txBody>
@@ -12973,16 +12882,16 @@
                           <a:solidFill>
                             <a:srgbClr val="000000"/>
                           </a:solidFill>
-                          <a:latin typeface="Calibri" pitchFamily="34" charset="0"/>
-                          <a:ea typeface="Calibri" pitchFamily="34" charset="-122"/>
-                          <a:cs typeface="Calibri" pitchFamily="34" charset="-120"/>
+                          <a:latin typeface="Calibri"/>
+                          <a:ea typeface="Calibri"/>
+                          <a:cs typeface="Calibri"/>
                         </a:rPr>
-                        <a:t>F (32)</a:t>
+                        <a:t>D (42)</a:t>
                       </a:r>
                       <a:endParaRPr lang="en-US" sz="1200">
-                        <a:latin typeface="Calibri" charset="0"/>
-                        <a:ea typeface="Calibri" charset="0"/>
-                        <a:cs typeface="Calibri" charset="0"/>
+                        <a:latin typeface="Calibri"/>
+                        <a:ea typeface="Calibri"/>
+                        <a:cs typeface="Calibri"/>
                       </a:endParaRPr>
                     </a:p>
                   </a:txBody>
@@ -13038,11 +12947,11 @@
                           <a:solidFill>
                             <a:srgbClr val="000000"/>
                           </a:solidFill>
-                          <a:latin typeface="Calibri" pitchFamily="34" charset="0"/>
-                          <a:ea typeface="Calibri" pitchFamily="34" charset="-122"/>
-                          <a:cs typeface="Calibri" pitchFamily="34" charset="-120"/>
+                          <a:latin typeface="Calibri"/>
+                          <a:ea typeface="Calibri"/>
+                          <a:cs typeface="Calibri"/>
                         </a:rPr>
-                        <a:t>0,42 g</a:t>
+                        <a:t>2,1 g</a:t>
                       </a:r>
                       <a:endParaRPr lang="en-US" sz="1200">
                         <a:latin typeface="Calibri" charset="0"/>
